--- a/퀴즈.pptx
+++ b/퀴즈.pptx
@@ -104,6 +104,11 @@
       </a:defRPr>
     </a:lvl9pPr>
   </p:defaultTextStyle>
+  <p:extLst>
+    <p:ext uri="{EFAFB233-063F-42B5-8137-9DF3F51BA10A}">
+      <p15:sldGuideLst xmlns:p15="http://schemas.microsoft.com/office/powerpoint/2012/main"/>
+    </p:ext>
+  </p:extLst>
 </p:presentation>
 </file>
 
@@ -254,7 +259,7 @@
           <a:p>
             <a:fld id="{326395FB-E930-49E8-B339-28C0964EDD28}" type="datetimeFigureOut">
               <a:rPr lang="ko-KR" altLang="en-US" smtClean="0"/>
-              <a:t>2026-08-11</a:t>
+              <a:t>2026-09-03</a:t>
             </a:fld>
             <a:endParaRPr lang="ko-KR" altLang="en-US"/>
           </a:p>
@@ -452,7 +457,7 @@
           <a:p>
             <a:fld id="{326395FB-E930-49E8-B339-28C0964EDD28}" type="datetimeFigureOut">
               <a:rPr lang="ko-KR" altLang="en-US" smtClean="0"/>
-              <a:t>2026-08-11</a:t>
+              <a:t>2026-09-03</a:t>
             </a:fld>
             <a:endParaRPr lang="ko-KR" altLang="en-US"/>
           </a:p>
@@ -660,7 +665,7 @@
           <a:p>
             <a:fld id="{326395FB-E930-49E8-B339-28C0964EDD28}" type="datetimeFigureOut">
               <a:rPr lang="ko-KR" altLang="en-US" smtClean="0"/>
-              <a:t>2026-08-11</a:t>
+              <a:t>2026-09-03</a:t>
             </a:fld>
             <a:endParaRPr lang="ko-KR" altLang="en-US"/>
           </a:p>
@@ -858,7 +863,7 @@
           <a:p>
             <a:fld id="{326395FB-E930-49E8-B339-28C0964EDD28}" type="datetimeFigureOut">
               <a:rPr lang="ko-KR" altLang="en-US" smtClean="0"/>
-              <a:t>2026-08-11</a:t>
+              <a:t>2026-09-03</a:t>
             </a:fld>
             <a:endParaRPr lang="ko-KR" altLang="en-US"/>
           </a:p>
@@ -1133,7 +1138,7 @@
           <a:p>
             <a:fld id="{326395FB-E930-49E8-B339-28C0964EDD28}" type="datetimeFigureOut">
               <a:rPr lang="ko-KR" altLang="en-US" smtClean="0"/>
-              <a:t>2026-08-11</a:t>
+              <a:t>2026-09-03</a:t>
             </a:fld>
             <a:endParaRPr lang="ko-KR" altLang="en-US"/>
           </a:p>
@@ -1398,7 +1403,7 @@
           <a:p>
             <a:fld id="{326395FB-E930-49E8-B339-28C0964EDD28}" type="datetimeFigureOut">
               <a:rPr lang="ko-KR" altLang="en-US" smtClean="0"/>
-              <a:t>2026-08-11</a:t>
+              <a:t>2026-09-03</a:t>
             </a:fld>
             <a:endParaRPr lang="ko-KR" altLang="en-US"/>
           </a:p>
@@ -1810,7 +1815,7 @@
           <a:p>
             <a:fld id="{326395FB-E930-49E8-B339-28C0964EDD28}" type="datetimeFigureOut">
               <a:rPr lang="ko-KR" altLang="en-US" smtClean="0"/>
-              <a:t>2026-08-11</a:t>
+              <a:t>2026-09-03</a:t>
             </a:fld>
             <a:endParaRPr lang="ko-KR" altLang="en-US"/>
           </a:p>
@@ -1951,7 +1956,7 @@
           <a:p>
             <a:fld id="{326395FB-E930-49E8-B339-28C0964EDD28}" type="datetimeFigureOut">
               <a:rPr lang="ko-KR" altLang="en-US" smtClean="0"/>
-              <a:t>2026-08-11</a:t>
+              <a:t>2026-09-03</a:t>
             </a:fld>
             <a:endParaRPr lang="ko-KR" altLang="en-US"/>
           </a:p>
@@ -2064,7 +2069,7 @@
           <a:p>
             <a:fld id="{326395FB-E930-49E8-B339-28C0964EDD28}" type="datetimeFigureOut">
               <a:rPr lang="ko-KR" altLang="en-US" smtClean="0"/>
-              <a:t>2026-08-11</a:t>
+              <a:t>2026-09-03</a:t>
             </a:fld>
             <a:endParaRPr lang="ko-KR" altLang="en-US"/>
           </a:p>
@@ -2375,7 +2380,7 @@
           <a:p>
             <a:fld id="{326395FB-E930-49E8-B339-28C0964EDD28}" type="datetimeFigureOut">
               <a:rPr lang="ko-KR" altLang="en-US" smtClean="0"/>
-              <a:t>2026-08-11</a:t>
+              <a:t>2026-09-03</a:t>
             </a:fld>
             <a:endParaRPr lang="ko-KR" altLang="en-US"/>
           </a:p>
@@ -2663,7 +2668,7 @@
           <a:p>
             <a:fld id="{326395FB-E930-49E8-B339-28C0964EDD28}" type="datetimeFigureOut">
               <a:rPr lang="ko-KR" altLang="en-US" smtClean="0"/>
-              <a:t>2026-08-11</a:t>
+              <a:t>2026-09-03</a:t>
             </a:fld>
             <a:endParaRPr lang="ko-KR" altLang="en-US"/>
           </a:p>
@@ -2904,7 +2909,7 @@
           <a:p>
             <a:fld id="{326395FB-E930-49E8-B339-28C0964EDD28}" type="datetimeFigureOut">
               <a:rPr lang="ko-KR" altLang="en-US" smtClean="0"/>
-              <a:t>2026-08-11</a:t>
+              <a:t>2026-09-03</a:t>
             </a:fld>
             <a:endParaRPr lang="ko-KR" altLang="en-US"/>
           </a:p>
@@ -3345,7 +3350,7 @@
         </p:spPr>
         <p:txBody>
           <a:bodyPr>
-            <a:normAutofit/>
+            <a:normAutofit lnSpcReduction="10000"/>
           </a:bodyPr>
           <a:lstStyle/>
           <a:p>
@@ -3353,31 +3358,31 @@
               <a:buNone/>
             </a:pPr>
             <a:r>
-              <a:rPr lang="en-US" altLang="ko-KR" sz="1800" b="1" dirty="0"/>
+              <a:rPr lang="en-US" altLang="ko-KR" sz="1600" b="1" dirty="0"/>
               <a:t>1. </a:t>
             </a:r>
             <a:r>
-              <a:rPr lang="ko-KR" altLang="en-US" sz="1800" b="1" dirty="0"/>
+              <a:rPr lang="ko-KR" altLang="en-US" sz="1600" b="1" dirty="0"/>
               <a:t>수업 중 배운 </a:t>
             </a:r>
             <a:r>
-              <a:rPr lang="en-US" altLang="ko-KR" sz="1800" b="1" dirty="0" err="1"/>
+              <a:rPr lang="en-US" altLang="ko-KR" sz="1600" b="1" dirty="0" err="1"/>
               <a:t>sklearn</a:t>
             </a:r>
             <a:r>
-              <a:rPr lang="ko-KR" altLang="en-US" sz="1800" b="1" dirty="0"/>
+              <a:rPr lang="ko-KR" altLang="en-US" sz="1600" b="1" dirty="0"/>
               <a:t>의 </a:t>
             </a:r>
             <a:r>
-              <a:rPr lang="en-US" altLang="ko-KR" sz="1800" b="1" dirty="0"/>
+              <a:rPr lang="en-US" altLang="ko-KR" sz="1600" b="1" dirty="0"/>
               <a:t>Pipeline</a:t>
             </a:r>
             <a:r>
-              <a:rPr lang="ko-KR" altLang="en-US" sz="1800" b="1" dirty="0"/>
+              <a:rPr lang="ko-KR" altLang="en-US" sz="1600" b="1" dirty="0"/>
               <a:t>은 스케쥴 기능이 있다 </a:t>
             </a:r>
             <a:r>
-              <a:rPr lang="en-US" altLang="ko-KR" sz="1800" b="1" dirty="0"/>
+              <a:rPr lang="en-US" altLang="ko-KR" sz="1600" b="1" dirty="0"/>
               <a:t>( O/X)</a:t>
             </a:r>
           </a:p>
@@ -3385,46 +3390,46 @@
             <a:pPr marL="0" indent="0">
               <a:buNone/>
             </a:pPr>
-            <a:endParaRPr lang="en-US" altLang="ko-KR" sz="1800" b="1" dirty="0"/>
+            <a:endParaRPr lang="en-US" altLang="ko-KR" sz="1600" b="1" dirty="0"/>
           </a:p>
           <a:p>
             <a:pPr marL="0" indent="0">
               <a:buNone/>
             </a:pPr>
             <a:r>
-              <a:rPr lang="en-US" altLang="ko-KR" sz="1800" b="1" dirty="0"/>
+              <a:rPr lang="en-US" altLang="ko-KR" sz="1600" b="1" dirty="0"/>
               <a:t>2. </a:t>
             </a:r>
             <a:r>
-              <a:rPr lang="ko-KR" altLang="en-US" sz="1800" b="1" dirty="0"/>
+              <a:rPr lang="ko-KR" altLang="en-US" sz="1600" b="1" dirty="0"/>
               <a:t>다음 중 </a:t>
             </a:r>
             <a:r>
-              <a:rPr lang="en-US" altLang="ko-KR" sz="1800" b="1" dirty="0" err="1"/>
+              <a:rPr lang="en-US" altLang="ko-KR" sz="1600" b="1" dirty="0" err="1"/>
               <a:t>sqlalchemy</a:t>
             </a:r>
             <a:r>
-              <a:rPr lang="ko-KR" altLang="en-US" sz="1800" b="1" dirty="0"/>
+              <a:rPr lang="ko-KR" altLang="en-US" sz="1600" b="1" dirty="0"/>
               <a:t>를 이용한 </a:t>
             </a:r>
             <a:r>
-              <a:rPr lang="en-US" altLang="ko-KR" sz="1800" b="1" dirty="0" err="1"/>
+              <a:rPr lang="en-US" altLang="ko-KR" sz="1600" b="1" dirty="0" err="1"/>
               <a:t>sqlite</a:t>
             </a:r>
             <a:r>
-              <a:rPr lang="ko-KR" altLang="en-US" sz="1800" b="1" dirty="0"/>
+              <a:rPr lang="ko-KR" altLang="en-US" sz="1600" b="1" dirty="0"/>
               <a:t>의 </a:t>
             </a:r>
             <a:r>
-              <a:rPr lang="en-US" altLang="ko-KR" sz="1800" b="1" dirty="0"/>
+              <a:rPr lang="en-US" altLang="ko-KR" sz="1600" b="1" dirty="0"/>
               <a:t>connection</a:t>
             </a:r>
             <a:r>
-              <a:rPr lang="ko-KR" altLang="en-US" sz="1800" b="1" dirty="0"/>
+              <a:rPr lang="ko-KR" altLang="en-US" sz="1600" b="1" dirty="0"/>
               <a:t>이 맞은 것은</a:t>
             </a:r>
             <a:r>
-              <a:rPr lang="en-US" altLang="ko-KR" sz="1800" b="1" dirty="0"/>
+              <a:rPr lang="en-US" altLang="ko-KR" sz="1600" b="1" dirty="0"/>
               <a:t>? (  )</a:t>
             </a:r>
           </a:p>
@@ -3433,27 +3438,27 @@
               <a:buAutoNum type="arabicParenR"/>
             </a:pPr>
             <a:r>
-              <a:rPr lang="en-US" altLang="ko-KR" sz="1800" b="1" dirty="0" err="1"/>
+              <a:rPr lang="en-US" altLang="ko-KR" sz="1600" b="1" dirty="0" err="1"/>
               <a:t>create_engine</a:t>
             </a:r>
             <a:r>
-              <a:rPr lang="en-US" altLang="ko-KR" sz="1800" b="1" dirty="0"/>
+              <a:rPr lang="en-US" altLang="ko-KR" sz="1600" b="1" dirty="0"/>
               <a:t>(“</a:t>
             </a:r>
             <a:r>
-              <a:rPr lang="en-US" altLang="ko-KR" sz="1800" b="1" dirty="0" err="1"/>
+              <a:rPr lang="en-US" altLang="ko-KR" sz="1600" b="1" dirty="0" err="1"/>
               <a:t>sqlite</a:t>
             </a:r>
             <a:r>
-              <a:rPr lang="en-US" altLang="ko-KR" sz="1800" b="1" dirty="0"/>
+              <a:rPr lang="en-US" altLang="ko-KR" sz="1600" b="1" dirty="0"/>
               <a:t>:///</a:t>
             </a:r>
             <a:r>
-              <a:rPr lang="en-US" altLang="ko-KR" sz="1800" b="1" dirty="0" err="1"/>
+              <a:rPr lang="en-US" altLang="ko-KR" sz="1600" b="1" dirty="0" err="1"/>
               <a:t>dbfile.db</a:t>
             </a:r>
             <a:r>
-              <a:rPr lang="en-US" altLang="ko-KR" sz="1800" b="1" dirty="0"/>
+              <a:rPr lang="en-US" altLang="ko-KR" sz="1600" b="1" dirty="0"/>
               <a:t>“)</a:t>
             </a:r>
           </a:p>
@@ -3463,27 +3468,27 @@
               <a:buAutoNum type="arabicParenR"/>
             </a:pPr>
             <a:r>
-              <a:rPr lang="en-US" altLang="ko-KR" sz="1800" b="1" dirty="0" err="1"/>
+              <a:rPr lang="en-US" altLang="ko-KR" sz="1600" b="1" dirty="0" err="1"/>
               <a:t>create_engine</a:t>
             </a:r>
             <a:r>
-              <a:rPr lang="en-US" altLang="ko-KR" sz="1800" b="1" dirty="0"/>
+              <a:rPr lang="en-US" altLang="ko-KR" sz="1600" b="1" dirty="0"/>
               <a:t>(“</a:t>
             </a:r>
             <a:r>
-              <a:rPr lang="en-US" altLang="ko-KR" sz="1800" b="1" dirty="0" err="1"/>
+              <a:rPr lang="en-US" altLang="ko-KR" sz="1600" b="1" dirty="0" err="1"/>
               <a:t>postgres</a:t>
             </a:r>
             <a:r>
-              <a:rPr lang="en-US" altLang="ko-KR" sz="1800" b="1" dirty="0"/>
+              <a:rPr lang="en-US" altLang="ko-KR" sz="1600" b="1" dirty="0"/>
               <a:t>:///</a:t>
             </a:r>
             <a:r>
-              <a:rPr lang="en-US" altLang="ko-KR" sz="1800" b="1" dirty="0" err="1"/>
+              <a:rPr lang="en-US" altLang="ko-KR" sz="1600" b="1" dirty="0" err="1"/>
               <a:t>dbfile.db</a:t>
             </a:r>
             <a:r>
-              <a:rPr lang="en-US" altLang="ko-KR" sz="1800" b="1" dirty="0"/>
+              <a:rPr lang="en-US" altLang="ko-KR" sz="1600" b="1" dirty="0"/>
               <a:t>“)</a:t>
             </a:r>
           </a:p>
@@ -3493,19 +3498,19 @@
               <a:buAutoNum type="arabicParenR"/>
             </a:pPr>
             <a:r>
-              <a:rPr lang="en-US" altLang="ko-KR" sz="1800" b="1" dirty="0" err="1"/>
+              <a:rPr lang="en-US" altLang="ko-KR" sz="1600" b="1" dirty="0" err="1"/>
               <a:t>create_engine</a:t>
             </a:r>
             <a:r>
-              <a:rPr lang="en-US" altLang="ko-KR" sz="1800" b="1" dirty="0"/>
+              <a:rPr lang="en-US" altLang="ko-KR" sz="1600" b="1" dirty="0"/>
               <a:t>(“</a:t>
             </a:r>
             <a:r>
-              <a:rPr lang="en-US" altLang="ko-KR" sz="1800" b="1" dirty="0" err="1"/>
+              <a:rPr lang="en-US" altLang="ko-KR" sz="1600" b="1" dirty="0" err="1"/>
               <a:t>sqlite</a:t>
             </a:r>
             <a:r>
-              <a:rPr lang="en-US" altLang="ko-KR" sz="1800" b="1" dirty="0"/>
+              <a:rPr lang="en-US" altLang="ko-KR" sz="1600" b="1" dirty="0"/>
               <a:t>://user:12345@dbfile.db“)</a:t>
             </a:r>
           </a:p>
@@ -3513,58 +3518,58 @@
             <a:pPr marL="0" indent="0">
               <a:buNone/>
             </a:pPr>
-            <a:endParaRPr lang="en-US" altLang="ko-KR" sz="1800" b="1" dirty="0"/>
+            <a:endParaRPr lang="en-US" altLang="ko-KR" sz="1600" b="1" dirty="0"/>
           </a:p>
           <a:p>
             <a:pPr marL="0" indent="0">
               <a:buNone/>
             </a:pPr>
             <a:r>
-              <a:rPr lang="en-US" altLang="ko-KR" sz="1800" b="1" dirty="0"/>
+              <a:rPr lang="en-US" altLang="ko-KR" sz="1600" b="1" dirty="0"/>
               <a:t>3. </a:t>
             </a:r>
             <a:r>
-              <a:rPr lang="en-US" altLang="ko-KR" sz="1800" b="1" dirty="0" err="1"/>
+              <a:rPr lang="en-US" altLang="ko-KR" sz="1600" b="1" dirty="0" err="1"/>
               <a:t>Streamlit</a:t>
             </a:r>
             <a:r>
-              <a:rPr lang="ko-KR" altLang="en-US" sz="1800" b="1" dirty="0"/>
+              <a:rPr lang="ko-KR" altLang="en-US" sz="1600" b="1" dirty="0"/>
               <a:t>에서 데이터프레임 </a:t>
             </a:r>
             <a:r>
-              <a:rPr lang="en-US" altLang="ko-KR" sz="1800" b="1" dirty="0" err="1"/>
+              <a:rPr lang="en-US" altLang="ko-KR" sz="1600" b="1" dirty="0" err="1"/>
               <a:t>df</a:t>
             </a:r>
             <a:r>
-              <a:rPr lang="ko-KR" altLang="en-US" sz="1800" b="1" dirty="0"/>
+              <a:rPr lang="ko-KR" altLang="en-US" sz="1600" b="1" dirty="0"/>
               <a:t>를 </a:t>
             </a:r>
             <a:r>
-              <a:rPr lang="en-US" altLang="ko-KR" sz="1800" b="1" dirty="0"/>
+              <a:rPr lang="en-US" altLang="ko-KR" sz="1600" b="1" dirty="0"/>
               <a:t>“</a:t>
             </a:r>
             <a:r>
-              <a:rPr lang="en-US" altLang="ko-KR" sz="1800" b="1" dirty="0" err="1"/>
+              <a:rPr lang="en-US" altLang="ko-KR" sz="1600" b="1" dirty="0" err="1"/>
               <a:t>df</a:t>
             </a:r>
             <a:r>
-              <a:rPr lang="en-US" altLang="ko-KR" sz="1800" b="1" dirty="0"/>
+              <a:rPr lang="en-US" altLang="ko-KR" sz="1600" b="1" dirty="0"/>
               <a:t>”</a:t>
             </a:r>
             <a:r>
-              <a:rPr lang="ko-KR" altLang="en-US" sz="1800" b="1" dirty="0"/>
+              <a:rPr lang="ko-KR" altLang="en-US" sz="1600" b="1" dirty="0"/>
               <a:t>로 </a:t>
             </a:r>
             <a:r>
-              <a:rPr lang="ko-KR" altLang="en-US" sz="1800" b="1" dirty="0" err="1"/>
+              <a:rPr lang="ko-KR" altLang="en-US" sz="1600" b="1" dirty="0" err="1"/>
               <a:t>세션값</a:t>
             </a:r>
             <a:r>
-              <a:rPr lang="ko-KR" altLang="en-US" sz="1800" b="1" dirty="0"/>
+              <a:rPr lang="ko-KR" altLang="en-US" sz="1600" b="1" dirty="0"/>
               <a:t> 저장하는 방식은</a:t>
             </a:r>
             <a:r>
-              <a:rPr lang="en-US" altLang="ko-KR" sz="1800" b="1" dirty="0"/>
+              <a:rPr lang="en-US" altLang="ko-KR" sz="1600" b="1" dirty="0"/>
               <a:t>? (   )</a:t>
             </a:r>
           </a:p>
@@ -3573,63 +3578,63 @@
               <a:buAutoNum type="arabicParenR"/>
             </a:pPr>
             <a:r>
-              <a:rPr lang="en-US" altLang="ko-KR" sz="1800" b="1" dirty="0" err="1"/>
+              <a:rPr lang="en-US" altLang="ko-KR" sz="1600" b="1" dirty="0" err="1"/>
               <a:t>st.session_state</a:t>
             </a:r>
             <a:r>
-              <a:rPr lang="en-US" altLang="ko-KR" sz="1800" b="1" dirty="0"/>
+              <a:rPr lang="en-US" altLang="ko-KR" sz="1600" b="1" dirty="0"/>
               <a:t>[“</a:t>
             </a:r>
             <a:r>
-              <a:rPr lang="en-US" altLang="ko-KR" sz="1800" b="1" dirty="0" err="1"/>
+              <a:rPr lang="en-US" altLang="ko-KR" sz="1600" b="1" dirty="0" err="1"/>
               <a:t>df</a:t>
             </a:r>
             <a:r>
-              <a:rPr lang="en-US" altLang="ko-KR" sz="1800" b="1" dirty="0"/>
+              <a:rPr lang="en-US" altLang="ko-KR" sz="1600" b="1" dirty="0"/>
               <a:t>”] = </a:t>
             </a:r>
             <a:r>
-              <a:rPr lang="en-US" altLang="ko-KR" sz="1800" b="1" dirty="0" err="1"/>
+              <a:rPr lang="en-US" altLang="ko-KR" sz="1600" b="1" dirty="0" err="1"/>
               <a:t>df</a:t>
             </a:r>
-            <a:endParaRPr lang="en-US" altLang="ko-KR" sz="1800" b="1" dirty="0"/>
+            <a:endParaRPr lang="en-US" altLang="ko-KR" sz="1600" b="1" dirty="0"/>
           </a:p>
           <a:p>
             <a:pPr marL="514350" indent="-514350">
               <a:buAutoNum type="arabicParenR"/>
             </a:pPr>
             <a:r>
-              <a:rPr lang="en-US" altLang="ko-KR" sz="1800" b="1" dirty="0" err="1"/>
+              <a:rPr lang="en-US" altLang="ko-KR" sz="1600" b="1" dirty="0" err="1"/>
               <a:t>df.session_state</a:t>
             </a:r>
             <a:r>
-              <a:rPr lang="en-US" altLang="ko-KR" sz="1800" b="1" dirty="0"/>
+              <a:rPr lang="en-US" altLang="ko-KR" sz="1600" b="1" dirty="0"/>
               <a:t>[“</a:t>
             </a:r>
             <a:r>
-              <a:rPr lang="en-US" altLang="ko-KR" sz="1800" b="1" dirty="0" err="1"/>
+              <a:rPr lang="en-US" altLang="ko-KR" sz="1600" b="1" dirty="0" err="1"/>
               <a:t>df</a:t>
             </a:r>
             <a:r>
-              <a:rPr lang="en-US" altLang="ko-KR" sz="1800" b="1" dirty="0"/>
+              <a:rPr lang="en-US" altLang="ko-KR" sz="1600" b="1" dirty="0"/>
               <a:t>”] = </a:t>
             </a:r>
             <a:r>
-              <a:rPr lang="en-US" altLang="ko-KR" sz="1800" b="1" dirty="0" err="1"/>
+              <a:rPr lang="en-US" altLang="ko-KR" sz="1600" b="1" dirty="0" err="1"/>
               <a:t>df</a:t>
             </a:r>
-            <a:endParaRPr lang="en-US" altLang="ko-KR" sz="1800" b="1" dirty="0"/>
+            <a:endParaRPr lang="en-US" altLang="ko-KR" sz="1600" b="1" dirty="0"/>
           </a:p>
           <a:p>
             <a:pPr marL="514350" indent="-514350">
               <a:buAutoNum type="arabicParenR"/>
             </a:pPr>
             <a:r>
-              <a:rPr lang="en-US" altLang="ko-KR" sz="1800" b="1" dirty="0" err="1"/>
+              <a:rPr lang="en-US" altLang="ko-KR" sz="1600" b="1" dirty="0" err="1"/>
               <a:t>st.session_state.df</a:t>
             </a:r>
             <a:r>
-              <a:rPr lang="en-US" altLang="ko-KR" sz="1800" b="1" dirty="0"/>
+              <a:rPr lang="en-US" altLang="ko-KR" sz="1600" b="1" dirty="0"/>
               <a:t>()</a:t>
             </a:r>
           </a:p>
@@ -3637,26 +3642,26 @@
             <a:pPr marL="0" indent="0">
               <a:buNone/>
             </a:pPr>
-            <a:endParaRPr lang="en-US" altLang="ko-KR" sz="1800" b="1" dirty="0"/>
+            <a:endParaRPr lang="en-US" altLang="ko-KR" sz="1600" b="1" dirty="0"/>
           </a:p>
           <a:p>
             <a:pPr marL="0" indent="0">
               <a:buNone/>
             </a:pPr>
             <a:r>
-              <a:rPr lang="en-US" altLang="ko-KR" sz="1800" b="1" dirty="0"/>
+              <a:rPr lang="en-US" altLang="ko-KR" sz="1600" b="1" dirty="0"/>
               <a:t>4. </a:t>
             </a:r>
             <a:r>
-              <a:rPr lang="ko-KR" altLang="en-US" sz="1800" b="1" dirty="0" err="1"/>
+              <a:rPr lang="ko-KR" altLang="en-US" sz="1600" b="1" dirty="0" err="1"/>
               <a:t>결측치를</a:t>
             </a:r>
             <a:r>
-              <a:rPr lang="ko-KR" altLang="en-US" sz="1800" b="1" dirty="0"/>
+              <a:rPr lang="ko-KR" altLang="en-US" sz="1600" b="1" dirty="0"/>
               <a:t> 처리하는 절차를 나타내는 용어는</a:t>
             </a:r>
             <a:r>
-              <a:rPr lang="en-US" altLang="ko-KR" sz="1800" b="1" dirty="0"/>
+              <a:rPr lang="en-US" altLang="ko-KR" sz="1600" b="1" dirty="0"/>
               <a:t>? (   )</a:t>
             </a:r>
           </a:p>
@@ -3665,14 +3670,55 @@
               <a:buNone/>
             </a:pPr>
             <a:r>
-              <a:rPr lang="en-US" altLang="ko-KR" sz="1800" b="1" dirty="0"/>
+              <a:rPr lang="en-US" altLang="ko-KR" sz="1600" b="1" dirty="0"/>
               <a:t>1) Importing  2) imputing 3) </a:t>
             </a:r>
             <a:r>
-              <a:rPr lang="en-US" altLang="ko-KR" sz="1800" b="1" dirty="0" err="1"/>
+              <a:rPr lang="en-US" altLang="ko-KR" sz="1600" b="1" dirty="0" err="1"/>
               <a:t>imbalancing</a:t>
             </a:r>
-            <a:endParaRPr lang="ko-KR" altLang="en-US" sz="1800" b="1" dirty="0"/>
+            <a:endParaRPr lang="en-US" altLang="ko-KR" sz="1600" b="1" dirty="0"/>
+          </a:p>
+          <a:p>
+            <a:pPr marL="0" indent="0">
+              <a:buNone/>
+            </a:pPr>
+            <a:endParaRPr lang="en-US" altLang="ko-KR" sz="1600" b="1" dirty="0"/>
+          </a:p>
+          <a:p>
+            <a:pPr marL="0" indent="0">
+              <a:buNone/>
+            </a:pPr>
+            <a:r>
+              <a:rPr lang="en-US" altLang="ko-KR" sz="1600" b="1" dirty="0"/>
+              <a:t>5. </a:t>
+            </a:r>
+            <a:r>
+              <a:rPr lang="ko-KR" altLang="en-US" sz="1600" b="1" dirty="0"/>
+              <a:t>다음 중 워크플로우 관리 라이브러리인 </a:t>
+            </a:r>
+            <a:r>
+              <a:rPr lang="en-US" altLang="ko-KR" sz="1600" b="1" dirty="0"/>
+              <a:t>prefect</a:t>
+            </a:r>
+            <a:r>
+              <a:rPr lang="ko-KR" altLang="en-US" sz="1600" b="1" dirty="0"/>
+              <a:t>의 구성 요소가 아닌 것은</a:t>
+            </a:r>
+            <a:r>
+              <a:rPr lang="en-US" altLang="ko-KR" sz="1600" b="1" dirty="0"/>
+              <a:t>? (   )</a:t>
+            </a:r>
+          </a:p>
+          <a:p>
+            <a:pPr marL="342900" indent="-342900">
+              <a:buAutoNum type="arabicParenR"/>
+            </a:pPr>
+            <a:r>
+              <a:rPr lang="en-US" altLang="ko-KR" sz="1600" b="1" dirty="0"/>
+              <a:t>flow  2) encoder 3) task</a:t>
+            </a:r>
+            <a:endParaRPr lang="ko-KR" altLang="en-US" sz="1600" b="1" dirty="0"/>
           </a:p>
         </p:txBody>
       </p:sp>
@@ -3691,7 +3737,7 @@
         <p:spPr>
           <a:xfrm>
             <a:off x="28016" y="224723"/>
-            <a:ext cx="11906208" cy="384721"/>
+            <a:ext cx="12047272" cy="384721"/>
           </a:xfrm>
           <a:prstGeom prst="rect">
             <a:avLst/>
@@ -3714,7 +3760,7 @@
             </a:r>
             <a:r>
               <a:rPr lang="en-US" altLang="ko-KR" sz="1900" b="1" dirty="0"/>
-              <a:t>O333 </a:t>
+              <a:t>O3333</a:t>
             </a:r>
             <a:r>
               <a:rPr lang="ko-KR" altLang="en-US" sz="1900" b="1" dirty="0"/>
